--- a/Domingo-21/S02_Domingo-21_3_Reel_Manana-el-lanzamiento_9x16.pptx
+++ b/Domingo-21/S02_Domingo-21_3_Reel_Manana-el-lanzamiento_9x16.pptx
@@ -3410,7 +3410,7 @@
         </p:nvSpPr>
         <p:spPr>
           <a:xfrm>
-            <a:off x="777240" y="1964436"/>
+            <a:off x="777240" y="3424936"/>
             <a:ext cx="1371600" cy="146304"/>
           </a:xfrm>
           <a:prstGeom prst="rect">
@@ -3454,8 +3454,8 @@
         </p:nvSpPr>
         <p:spPr>
           <a:xfrm>
-            <a:off x="777240" y="2421636"/>
-            <a:ext cx="6675120" cy="9055608"/>
+            <a:off x="777240" y="3882136"/>
+            <a:ext cx="6675120" cy="6134608"/>
           </a:xfrm>
           <a:prstGeom prst="rect">
             <a:avLst/>
@@ -3480,7 +3480,7 @@
                 </a:solidFill>
                 <a:latin typeface="Inter"/>
               </a:rPr>
-              <a:t>Pero ya puedes probarlo en early access.</a:t>
+              <a:t>Conócenos hoy en el sitio.</a:t>
             </a:r>
           </a:p>
         </p:txBody>
@@ -3645,7 +3645,7 @@
         </p:nvSpPr>
         <p:spPr>
           <a:xfrm>
-            <a:off x="777240" y="4798124"/>
+            <a:off x="777240" y="5314061"/>
             <a:ext cx="1371600" cy="146304"/>
           </a:xfrm>
           <a:prstGeom prst="rect">
@@ -3689,8 +3689,8 @@
         </p:nvSpPr>
         <p:spPr>
           <a:xfrm>
-            <a:off x="777240" y="5255324"/>
-            <a:ext cx="6675120" cy="3388232"/>
+            <a:off x="777240" y="5771261"/>
+            <a:ext cx="6675120" cy="2356358"/>
           </a:xfrm>
           <a:prstGeom prst="rect">
             <a:avLst/>
@@ -3715,7 +3715,7 @@
                 </a:solidFill>
                 <a:latin typeface="Inter"/>
               </a:rPr>
-              <a:t>Entra hoy: notaly.com.ve</a:t>
+              <a:t>notaly.com.ve</a:t>
             </a:r>
           </a:p>
         </p:txBody>
